--- a/public/projects/omega/assets/notes.pptx
+++ b/public/projects/omega/assets/notes.pptx
@@ -6,9 +6,10 @@
   </p:sldMasterIdLst>
   <p:sldIdLst>
     <p:sldId id="256" r:id="rId2"/>
-    <p:sldId id="257" r:id="rId3"/>
-    <p:sldId id="258" r:id="rId4"/>
-    <p:sldId id="259" r:id="rId5"/>
+    <p:sldId id="260" r:id="rId3"/>
+    <p:sldId id="257" r:id="rId4"/>
+    <p:sldId id="258" r:id="rId5"/>
+    <p:sldId id="259" r:id="rId6"/>
   </p:sldIdLst>
   <p:sldSz cx="12192000" cy="6858000"/>
   <p:notesSz cx="6858000" cy="9144000"/>
@@ -262,7 +263,7 @@
           <a:p>
             <a:fld id="{0935FF75-45A3-4BBC-8BA3-1E37C804F307}" type="datetimeFigureOut">
               <a:rPr lang="en-US" smtClean="0"/>
-              <a:t>1/28/2026</a:t>
+              <a:t>2/8/2026</a:t>
             </a:fld>
             <a:endParaRPr lang="en-US"/>
           </a:p>
@@ -460,7 +461,7 @@
           <a:p>
             <a:fld id="{0935FF75-45A3-4BBC-8BA3-1E37C804F307}" type="datetimeFigureOut">
               <a:rPr lang="en-US" smtClean="0"/>
-              <a:t>1/28/2026</a:t>
+              <a:t>2/8/2026</a:t>
             </a:fld>
             <a:endParaRPr lang="en-US"/>
           </a:p>
@@ -668,7 +669,7 @@
           <a:p>
             <a:fld id="{0935FF75-45A3-4BBC-8BA3-1E37C804F307}" type="datetimeFigureOut">
               <a:rPr lang="en-US" smtClean="0"/>
-              <a:t>1/28/2026</a:t>
+              <a:t>2/8/2026</a:t>
             </a:fld>
             <a:endParaRPr lang="en-US"/>
           </a:p>
@@ -866,7 +867,7 @@
           <a:p>
             <a:fld id="{0935FF75-45A3-4BBC-8BA3-1E37C804F307}" type="datetimeFigureOut">
               <a:rPr lang="en-US" smtClean="0"/>
-              <a:t>1/28/2026</a:t>
+              <a:t>2/8/2026</a:t>
             </a:fld>
             <a:endParaRPr lang="en-US"/>
           </a:p>
@@ -1141,7 +1142,7 @@
           <a:p>
             <a:fld id="{0935FF75-45A3-4BBC-8BA3-1E37C804F307}" type="datetimeFigureOut">
               <a:rPr lang="en-US" smtClean="0"/>
-              <a:t>1/28/2026</a:t>
+              <a:t>2/8/2026</a:t>
             </a:fld>
             <a:endParaRPr lang="en-US"/>
           </a:p>
@@ -1406,7 +1407,7 @@
           <a:p>
             <a:fld id="{0935FF75-45A3-4BBC-8BA3-1E37C804F307}" type="datetimeFigureOut">
               <a:rPr lang="en-US" smtClean="0"/>
-              <a:t>1/28/2026</a:t>
+              <a:t>2/8/2026</a:t>
             </a:fld>
             <a:endParaRPr lang="en-US"/>
           </a:p>
@@ -1818,7 +1819,7 @@
           <a:p>
             <a:fld id="{0935FF75-45A3-4BBC-8BA3-1E37C804F307}" type="datetimeFigureOut">
               <a:rPr lang="en-US" smtClean="0"/>
-              <a:t>1/28/2026</a:t>
+              <a:t>2/8/2026</a:t>
             </a:fld>
             <a:endParaRPr lang="en-US"/>
           </a:p>
@@ -1959,7 +1960,7 @@
           <a:p>
             <a:fld id="{0935FF75-45A3-4BBC-8BA3-1E37C804F307}" type="datetimeFigureOut">
               <a:rPr lang="en-US" smtClean="0"/>
-              <a:t>1/28/2026</a:t>
+              <a:t>2/8/2026</a:t>
             </a:fld>
             <a:endParaRPr lang="en-US"/>
           </a:p>
@@ -2072,7 +2073,7 @@
           <a:p>
             <a:fld id="{0935FF75-45A3-4BBC-8BA3-1E37C804F307}" type="datetimeFigureOut">
               <a:rPr lang="en-US" smtClean="0"/>
-              <a:t>1/28/2026</a:t>
+              <a:t>2/8/2026</a:t>
             </a:fld>
             <a:endParaRPr lang="en-US"/>
           </a:p>
@@ -2383,7 +2384,7 @@
           <a:p>
             <a:fld id="{0935FF75-45A3-4BBC-8BA3-1E37C804F307}" type="datetimeFigureOut">
               <a:rPr lang="en-US" smtClean="0"/>
-              <a:t>1/28/2026</a:t>
+              <a:t>2/8/2026</a:t>
             </a:fld>
             <a:endParaRPr lang="en-US"/>
           </a:p>
@@ -2671,7 +2672,7 @@
           <a:p>
             <a:fld id="{0935FF75-45A3-4BBC-8BA3-1E37C804F307}" type="datetimeFigureOut">
               <a:rPr lang="en-US" smtClean="0"/>
-              <a:t>1/28/2026</a:t>
+              <a:t>2/8/2026</a:t>
             </a:fld>
             <a:endParaRPr lang="en-US"/>
           </a:p>
@@ -2912,7 +2913,7 @@
           <a:p>
             <a:fld id="{0935FF75-45A3-4BBC-8BA3-1E37C804F307}" type="datetimeFigureOut">
               <a:rPr lang="en-US" smtClean="0"/>
-              <a:t>1/28/2026</a:t>
+              <a:t>2/8/2026</a:t>
             </a:fld>
             <a:endParaRPr lang="en-US"/>
           </a:p>
@@ -3357,7 +3358,7 @@
         </p:blipFill>
         <p:spPr>
           <a:xfrm>
-            <a:off x="5520018" y="185457"/>
+            <a:off x="4343398" y="5090427"/>
             <a:ext cx="2857500" cy="923925"/>
           </a:xfrm>
           <a:prstGeom prst="rect">
@@ -4219,637 +4220,85 @@
           <a:chExt cx="0" cy="0"/>
         </a:xfrm>
       </p:grpSpPr>
-      <p:sp>
-        <p:nvSpPr>
-          <p:cNvPr id="2" name="TextBox 1">
-            <a:extLst>
-              <a:ext uri="{FF2B5EF4-FFF2-40B4-BE49-F238E27FC236}">
-                <a16:creationId xmlns:a16="http://schemas.microsoft.com/office/drawing/2014/main" id="{43CF4336-E580-4101-B9BE-7EA9943BC882}"/>
-              </a:ext>
-            </a:extLst>
-          </p:cNvPr>
-          <p:cNvSpPr txBox="1"/>
+      <p:pic>
+        <p:nvPicPr>
+          <p:cNvPr id="3" name="Picture 2">
+            <a:extLst>
+              <a:ext uri="{FF2B5EF4-FFF2-40B4-BE49-F238E27FC236}">
+                <a16:creationId xmlns:a16="http://schemas.microsoft.com/office/drawing/2014/main" id="{ED0AB942-FD11-4E00-BE2A-9F80D556018C}"/>
+              </a:ext>
+            </a:extLst>
+          </p:cNvPr>
+          <p:cNvPicPr>
+            <a:picLocks noChangeAspect="1"/>
+          </p:cNvPicPr>
           <p:nvPr/>
-        </p:nvSpPr>
+        </p:nvPicPr>
+        <p:blipFill>
+          <a:blip r:embed="rId2">
+            <a:extLst>
+              <a:ext uri="{28A0092B-C50C-407E-A947-70E740481C1C}">
+                <a14:useLocalDpi xmlns:a14="http://schemas.microsoft.com/office/drawing/2010/main" val="0"/>
+              </a:ext>
+            </a:extLst>
+          </a:blip>
+          <a:stretch>
+            <a:fillRect/>
+          </a:stretch>
+        </p:blipFill>
         <p:spPr>
           <a:xfrm>
-            <a:off x="394447" y="234763"/>
-            <a:ext cx="11568953" cy="6001643"/>
+            <a:off x="78508" y="231993"/>
+            <a:ext cx="5952840" cy="5952840"/>
           </a:xfrm>
           <a:prstGeom prst="rect">
             <a:avLst/>
           </a:prstGeom>
-          <a:noFill/>
         </p:spPr>
-        <p:txBody>
-          <a:bodyPr wrap="square" rtlCol="0">
-            <a:spAutoFit/>
-          </a:bodyPr>
-          <a:lstStyle/>
-          <a:p>
-            <a:r>
-              <a:rPr lang="en-US" sz="800" dirty="0">
-                <a:effectLst/>
-              </a:rPr>
-              <a:t>GR: </a:t>
-            </a:r>
-            <a:r>
-              <a:rPr lang="vi-VN" sz="800" dirty="0">
-                <a:effectLst/>
-              </a:rPr>
-              <a:t>Logo của bạn sử dụng hai màu chủ đạo rất nổi bật và tương phản mạnh:</a:t>
-            </a:r>
-          </a:p>
-          <a:p>
-            <a:pPr>
-              <a:buFont typeface="Arial" panose="020B0604020202020204" pitchFamily="34" charset="0"/>
-              <a:buChar char="•"/>
-            </a:pPr>
-            <a:r>
-              <a:rPr lang="vi-VN" sz="800" b="1" dirty="0"/>
-              <a:t>Xanh lá đậm tươi</a:t>
-            </a:r>
-            <a:r>
-              <a:rPr lang="vi-VN" sz="800" dirty="0"/>
-              <a:t> (#00A651) – màu xanh lá cây tươi sáng, mang cảm giác năng lượng, tăng trưởng, tin cậy (thường thấy trong ERP, công nghệ, môi trường).</a:t>
-            </a:r>
-          </a:p>
-          <a:p>
-            <a:pPr>
-              <a:buFont typeface="Arial" panose="020B0604020202020204" pitchFamily="34" charset="0"/>
-              <a:buChar char="•"/>
-            </a:pPr>
-            <a:r>
-              <a:rPr lang="vi-VN" sz="800" b="1" dirty="0"/>
-              <a:t>Đỏ tươi sáng</a:t>
-            </a:r>
-            <a:r>
-              <a:rPr lang="vi-VN" sz="800" dirty="0"/>
-              <a:t> (#ED1C24) – màu đỏ năng động, mạnh mẽ, chú ý cao, urgency.</a:t>
-            </a:r>
-          </a:p>
-          <a:p>
-            <a:r>
-              <a:rPr lang="vi-VN" sz="800" dirty="0">
-                <a:effectLst/>
-              </a:rPr>
-              <a:t>Cặp màu này đã có sự tương phản rất tốt (gần như complementary trên bánh xe màu), nên background cần được chọn để </a:t>
-            </a:r>
-            <a:r>
-              <a:rPr lang="vi-VN" sz="800" b="1" dirty="0">
-                <a:effectLst/>
-              </a:rPr>
-              <a:t>làm nổi bật cả hai</a:t>
-            </a:r>
-            <a:r>
-              <a:rPr lang="vi-VN" sz="800" dirty="0">
-                <a:effectLst/>
-              </a:rPr>
-              <a:t> mà không lấn át logo.</a:t>
-            </a:r>
-          </a:p>
-          <a:p>
-            <a:r>
-              <a:rPr lang="vi-VN" sz="800" b="1" dirty="0"/>
-              <a:t>1. Hình nền đơn sắc (solid / plain background) nên là màu gì?</a:t>
-            </a:r>
-          </a:p>
-          <a:p>
-            <a:r>
-              <a:rPr lang="vi-VN" sz="800" dirty="0">
-                <a:effectLst/>
-              </a:rPr>
-              <a:t>Các lựa chọn tốt nhất (xếp theo độ khuyến nghị cho logo ERP chuyên nghiệp, hiện đại):</a:t>
-            </a:r>
-          </a:p>
-          <a:p>
-            <a:pPr>
-              <a:buFont typeface="Arial" panose="020B0604020202020204" pitchFamily="34" charset="0"/>
-              <a:buChar char="•"/>
-            </a:pPr>
-            <a:r>
-              <a:rPr lang="vi-VN" sz="800" b="1" dirty="0"/>
-              <a:t>Trắng tinh (#FFFFFF)</a:t>
-            </a:r>
-            <a:r>
-              <a:rPr lang="vi-VN" sz="800" dirty="0"/>
-              <a:t> hoặc trắng ngà nhẹ (#F8F9FA, #FAFAFA) → Lựa chọn an toàn và phổ biến nhất. Logo xanh-đỏ sẽ nổi bật cực mạnh, sạch sẽ, chuyên nghiệp, dễ đọc chữ/text overlay.</a:t>
-            </a:r>
-          </a:p>
-          <a:p>
-            <a:pPr>
-              <a:buFont typeface="Arial" panose="020B0604020202020204" pitchFamily="34" charset="0"/>
-              <a:buChar char="•"/>
-            </a:pPr>
-            <a:r>
-              <a:rPr lang="vi-VN" sz="800" b="1" dirty="0"/>
-              <a:t>Xám nhạt trung tính</a:t>
-            </a:r>
-            <a:r>
-              <a:rPr lang="vi-VN" sz="800" dirty="0"/>
-              <a:t> (#F5F5F5, #EEEEEE, #E0E0E0) → Hiện đại hơn trắng một chút, giảm độ chói, vẫn giữ độ tương phản rất cao với cả hai màu.</a:t>
-            </a:r>
-          </a:p>
-          <a:p>
-            <a:pPr>
-              <a:buFont typeface="Arial" panose="020B0604020202020204" pitchFamily="34" charset="0"/>
-              <a:buChar char="•"/>
-            </a:pPr>
-            <a:r>
-              <a:rPr lang="vi-VN" sz="800" b="1" dirty="0"/>
-              <a:t>Đen (#000000) hoặc xám đậm (#1A1A1A, #121212)</a:t>
-            </a:r>
-            <a:r>
-              <a:rPr lang="vi-VN" sz="800" dirty="0"/>
-              <a:t> → Rất mạnh mẽ, sang trọng, logo sẽ "pop" cực kỳ nổi bật (kiểu dark mode). Phù hợp nếu muốn giao diện premium, tech cao cấp.</a:t>
-            </a:r>
-          </a:p>
-          <a:p>
-            <a:pPr>
-              <a:buFont typeface="Arial" panose="020B0604020202020204" pitchFamily="34" charset="0"/>
-              <a:buChar char="•"/>
-            </a:pPr>
-            <a:r>
-              <a:rPr lang="vi-VN" sz="800" b="1" dirty="0"/>
-              <a:t>Xám trung (#808080 – #A0A0A0)</a:t>
-            </a:r>
-            <a:r>
-              <a:rPr lang="vi-VN" sz="800" dirty="0"/>
-              <a:t> → Tránh, vì tương phản với #00A651 giảm mạnh (có thể không đạt WCAG AA cho text trắng/đen overlay).</a:t>
-            </a:r>
-          </a:p>
-          <a:p>
-            <a:r>
-              <a:rPr lang="vi-VN" sz="800" dirty="0">
-                <a:effectLst/>
-              </a:rPr>
-              <a:t>→ </a:t>
-            </a:r>
-            <a:r>
-              <a:rPr lang="vi-VN" sz="800" b="1" dirty="0">
-                <a:effectLst/>
-              </a:rPr>
-              <a:t>Khuyến nghị hàng đầu</a:t>
-            </a:r>
-            <a:r>
-              <a:rPr lang="vi-VN" sz="800" dirty="0">
-                <a:effectLst/>
-              </a:rPr>
-              <a:t>: </a:t>
-            </a:r>
-            <a:r>
-              <a:rPr lang="vi-VN" sz="800" b="1" dirty="0">
-                <a:effectLst/>
-              </a:rPr>
-              <a:t>Trắng (#FFFFFF)</a:t>
-            </a:r>
-            <a:r>
-              <a:rPr lang="vi-VN" sz="800" dirty="0">
-                <a:effectLst/>
-              </a:rPr>
-              <a:t> hoặc </a:t>
-            </a:r>
-            <a:r>
-              <a:rPr lang="vi-VN" sz="800" b="1" dirty="0">
-                <a:effectLst/>
-              </a:rPr>
-              <a:t>xám rất nhạt (#F8F8F8)</a:t>
-            </a:r>
-            <a:r>
-              <a:rPr lang="vi-VN" sz="800" dirty="0">
-                <a:effectLst/>
-              </a:rPr>
-              <a:t> cho hầu hết các trường hợp website/ứng dụng ERP.</a:t>
-            </a:r>
-          </a:p>
-          <a:p>
-            <a:r>
-              <a:rPr lang="vi-VN" sz="800" b="1" dirty="0"/>
-              <a:t>2. Hình nền đa sắc / gradient nên là tổ hợp của cặp đôi, bộ ba màu gì?</a:t>
-            </a:r>
-          </a:p>
-          <a:p>
-            <a:r>
-              <a:rPr lang="vi-VN" sz="800" dirty="0">
-                <a:effectLst/>
-              </a:rPr>
-              <a:t>Gradient cần nhẹ nhàng, không lấn át logo. Nên dùng tông trung tính + accent nhẹ từ hai màu chủ đạo.</a:t>
-            </a:r>
-          </a:p>
-          <a:p>
-            <a:r>
-              <a:rPr lang="vi-VN" sz="800" dirty="0">
-                <a:effectLst/>
-              </a:rPr>
-              <a:t>Các tổ hợp đẹp và cân bằng:</a:t>
-            </a:r>
-          </a:p>
-          <a:p>
-            <a:pPr>
-              <a:buFont typeface="Arial" panose="020B0604020202020204" pitchFamily="34" charset="0"/>
-              <a:buChar char="•"/>
-            </a:pPr>
-            <a:r>
-              <a:rPr lang="vi-VN" sz="800" b="1" dirty="0"/>
-              <a:t>Cặp đôi đơn giản &amp; an toàn</a:t>
-            </a:r>
-            <a:r>
-              <a:rPr lang="vi-VN" sz="800" dirty="0"/>
-              <a:t>:</a:t>
-            </a:r>
-          </a:p>
-          <a:p>
-            <a:pPr marL="742950" lvl="1" indent="-285750">
-              <a:buFont typeface="Arial" panose="020B0604020202020204" pitchFamily="34" charset="0"/>
-              <a:buChar char="•"/>
-            </a:pPr>
-            <a:r>
-              <a:rPr lang="vi-VN" sz="800" dirty="0"/>
-              <a:t>Từ #F8F9FA (trắng ngà) → #E8F5E9 (xanh lá rất nhạt) – nhẹ, tươi mới, nhấn nhẹ màu xanh chủ đạo.</a:t>
-            </a:r>
-          </a:p>
-          <a:p>
-            <a:pPr marL="742950" lvl="1" indent="-285750">
-              <a:buFont typeface="Arial" panose="020B0604020202020204" pitchFamily="34" charset="0"/>
-              <a:buChar char="•"/>
-            </a:pPr>
-            <a:r>
-              <a:rPr lang="vi-VN" sz="800" dirty="0"/>
-              <a:t>Từ #FFFFFF → #FFF5F5 (đỏ rất nhạt / hồng nhạt) – ấm áp, nhấn nhẹ màu đỏ.</a:t>
-            </a:r>
-          </a:p>
-          <a:p>
-            <a:pPr marL="742950" lvl="1" indent="-285750">
-              <a:buFont typeface="Arial" panose="020B0604020202020204" pitchFamily="34" charset="0"/>
-              <a:buChar char="•"/>
-            </a:pPr>
-            <a:r>
-              <a:rPr lang="vi-VN" sz="800" dirty="0"/>
-              <a:t>Từ #F5F5F5 → #E8ECEF (xám nhạt gradient) – trung tính, hiện đại.</a:t>
-            </a:r>
-          </a:p>
-          <a:p>
-            <a:pPr>
-              <a:buFont typeface="Arial" panose="020B0604020202020204" pitchFamily="34" charset="0"/>
-              <a:buChar char="•"/>
-            </a:pPr>
-            <a:r>
-              <a:rPr lang="vi-VN" sz="800" b="1" dirty="0"/>
-              <a:t>Gradient dùng cả hai màu chủ đạo (nhẹ)</a:t>
-            </a:r>
-            <a:r>
-              <a:rPr lang="vi-VN" sz="800" dirty="0"/>
-              <a:t>:</a:t>
-            </a:r>
-          </a:p>
-          <a:p>
-            <a:pPr marL="742950" lvl="1" indent="-285750">
-              <a:buFont typeface="Arial" panose="020B0604020202020204" pitchFamily="34" charset="0"/>
-              <a:buChar char="•"/>
-            </a:pPr>
-            <a:r>
-              <a:rPr lang="vi-VN" sz="800" dirty="0"/>
-              <a:t>Từ #E8F5E9 (xanh nhạt) → #FFEBEE (đỏ nhạt) – rất tinh tế, liên kết hai màu logo.</a:t>
-            </a:r>
-          </a:p>
-          <a:p>
-            <a:pPr marL="742950" lvl="1" indent="-285750">
-              <a:buFont typeface="Arial" panose="020B0604020202020204" pitchFamily="34" charset="0"/>
-              <a:buChar char="•"/>
-            </a:pPr>
-            <a:r>
-              <a:rPr lang="vi-VN" sz="800" dirty="0"/>
-              <a:t>Từ #D4F4E2 → #FFE4E1 – gradient tươi sáng, năng động nhưng không chói.</a:t>
-            </a:r>
-          </a:p>
-          <a:p>
-            <a:pPr>
-              <a:buFont typeface="Arial" panose="020B0604020202020204" pitchFamily="34" charset="0"/>
-              <a:buChar char="•"/>
-            </a:pPr>
-            <a:r>
-              <a:rPr lang="vi-VN" sz="800" b="1" dirty="0"/>
-              <a:t>Bộ ba màu đẹp (gradient 3 điểm)</a:t>
-            </a:r>
-            <a:r>
-              <a:rPr lang="vi-VN" sz="800" dirty="0"/>
-              <a:t>:</a:t>
-            </a:r>
-          </a:p>
-          <a:p>
-            <a:pPr marL="742950" lvl="1" indent="-285750">
-              <a:buFont typeface="Arial" panose="020B0604020202020204" pitchFamily="34" charset="0"/>
-              <a:buChar char="•"/>
-            </a:pPr>
-            <a:r>
-              <a:rPr lang="vi-VN" sz="800" dirty="0"/>
-              <a:t>#FFFFFF → #E8F5E9 → #FFEBEE – trắng → xanh nhạt → đỏ nhạt (rất hài hòa).</a:t>
-            </a:r>
-          </a:p>
-          <a:p>
-            <a:pPr marL="742950" lvl="1" indent="-285750">
-              <a:buFont typeface="Arial" panose="020B0604020202020204" pitchFamily="34" charset="0"/>
-              <a:buChar char="•"/>
-            </a:pPr>
-            <a:r>
-              <a:rPr lang="vi-VN" sz="800" dirty="0"/>
-              <a:t>#F0F4F8 → #E8F5E9 → #FFF0F0 – tông lạnh → xanh → ấm nhẹ.</a:t>
-            </a:r>
-          </a:p>
-          <a:p>
-            <a:pPr marL="742950" lvl="1" indent="-285750">
-              <a:buFont typeface="Arial" panose="020B0604020202020204" pitchFamily="34" charset="0"/>
-              <a:buChar char="•"/>
-            </a:pPr>
-            <a:r>
-              <a:rPr lang="vi-VN" sz="800" dirty="0"/>
-              <a:t>#1E3A2F (xanh đậm tối) → #00A651 → #ED1C24 – mạnh mẽ, nhưng chỉ dùng nếu muốn gradient đậm, ấn tượng cao (dark theme).</a:t>
-            </a:r>
-          </a:p>
-          <a:p>
-            <a:r>
-              <a:rPr lang="vi-VN" sz="800" dirty="0">
-                <a:effectLst/>
-              </a:rPr>
-              <a:t>→ </a:t>
-            </a:r>
-            <a:r>
-              <a:rPr lang="vi-VN" sz="800" b="1" dirty="0">
-                <a:effectLst/>
-              </a:rPr>
-              <a:t>Khuyến nghị hàng đầu</a:t>
-            </a:r>
-            <a:r>
-              <a:rPr lang="vi-VN" sz="800" dirty="0">
-                <a:effectLst/>
-              </a:rPr>
-              <a:t>: Gradient nhẹ từ </a:t>
-            </a:r>
-            <a:r>
-              <a:rPr lang="vi-VN" sz="800" b="1" dirty="0">
-                <a:effectLst/>
-              </a:rPr>
-              <a:t>trắng/xám nhạt → xanh rất nhạt (#E8F5E9)</a:t>
-            </a:r>
-            <a:r>
-              <a:rPr lang="vi-VN" sz="800" dirty="0">
-                <a:effectLst/>
-              </a:rPr>
-              <a:t> hoặc </a:t>
-            </a:r>
-            <a:r>
-              <a:rPr lang="vi-VN" sz="800" b="1" dirty="0">
-                <a:effectLst/>
-              </a:rPr>
-              <a:t>trắng → đỏ rất nhạt (#FFEBEE)</a:t>
-            </a:r>
-            <a:r>
-              <a:rPr lang="vi-VN" sz="800" dirty="0">
-                <a:effectLst/>
-              </a:rPr>
-              <a:t>. Tránh gradient mạnh giữa #00A651 và #ED1C24 trực tiếp vì sẽ tạo cảm giác "đánh nhau" và làm logo khó nổi.</a:t>
-            </a:r>
-          </a:p>
-          <a:p>
-            <a:r>
-              <a:rPr lang="vi-VN" sz="800" b="1" dirty="0"/>
-              <a:t>3. Các màu tương phản tốt nhất với cặp màu chủ đạo (#00A651 &amp; #ED1C24)</a:t>
-            </a:r>
-          </a:p>
-          <a:p>
-            <a:r>
-              <a:rPr lang="vi-VN" sz="800" dirty="0">
-                <a:effectLst/>
-              </a:rPr>
-              <a:t>Đây là các màu có độ tương phản cao (dùng cho text, icon, button, border khi đặt lên nền hoặc ngược lại):</a:t>
-            </a:r>
-          </a:p>
-          <a:p>
-            <a:pPr>
-              <a:buFont typeface="Arial" panose="020B0604020202020204" pitchFamily="34" charset="0"/>
-              <a:buChar char="•"/>
-            </a:pPr>
-            <a:r>
-              <a:rPr lang="vi-VN" sz="800" b="1" dirty="0"/>
-              <a:t>Tương phản cực cao với cả hai</a:t>
-            </a:r>
-            <a:r>
-              <a:rPr lang="vi-VN" sz="800" dirty="0"/>
-              <a:t> (top choice):</a:t>
-            </a:r>
-          </a:p>
-          <a:p>
-            <a:pPr marL="742950" lvl="1" indent="-285750">
-              <a:buFont typeface="Arial" panose="020B0604020202020204" pitchFamily="34" charset="0"/>
-              <a:buChar char="•"/>
-            </a:pPr>
-            <a:r>
-              <a:rPr lang="vi-VN" sz="800" b="1" dirty="0"/>
-              <a:t>Trắng (#FFFFFF)</a:t>
-            </a:r>
-            <a:r>
-              <a:rPr lang="vi-VN" sz="800" dirty="0"/>
-              <a:t> – tuyệt vời trên cả xanh và đỏ.</a:t>
-            </a:r>
-          </a:p>
-          <a:p>
-            <a:pPr marL="742950" lvl="1" indent="-285750">
-              <a:buFont typeface="Arial" panose="020B0604020202020204" pitchFamily="34" charset="0"/>
-              <a:buChar char="•"/>
-            </a:pPr>
-            <a:r>
-              <a:rPr lang="vi-VN" sz="800" b="1" dirty="0"/>
-              <a:t>Đen (#000000)</a:t>
-            </a:r>
-            <a:r>
-              <a:rPr lang="vi-VN" sz="800" dirty="0"/>
-              <a:t> hoặc gần đen (#0F0F0F) – cực nổi trên cả hai.</a:t>
-            </a:r>
-          </a:p>
-          <a:p>
-            <a:pPr marL="742950" lvl="1" indent="-285750">
-              <a:buFont typeface="Arial" panose="020B0604020202020204" pitchFamily="34" charset="0"/>
-              <a:buChar char="•"/>
-            </a:pPr>
-            <a:r>
-              <a:rPr lang="vi-VN" sz="800" b="1" dirty="0"/>
-              <a:t>Xám đậm (#333333, #222222)</a:t>
-            </a:r>
-            <a:r>
-              <a:rPr lang="vi-VN" sz="800" dirty="0"/>
-              <a:t>.</a:t>
-            </a:r>
-          </a:p>
-          <a:p>
-            <a:pPr>
-              <a:buFont typeface="Arial" panose="020B0604020202020204" pitchFamily="34" charset="0"/>
-              <a:buChar char="•"/>
-            </a:pPr>
-            <a:r>
-              <a:rPr lang="vi-VN" sz="800" b="1" dirty="0"/>
-              <a:t>Tương phản tốt đặc biệt với #00A651 (xanh)</a:t>
-            </a:r>
-            <a:r>
-              <a:rPr lang="vi-VN" sz="800" dirty="0"/>
-              <a:t>:</a:t>
-            </a:r>
-          </a:p>
-          <a:p>
-            <a:pPr marL="742950" lvl="1" indent="-285750">
-              <a:buFont typeface="Arial" panose="020B0604020202020204" pitchFamily="34" charset="0"/>
-              <a:buChar char="•"/>
-            </a:pPr>
-            <a:r>
-              <a:rPr lang="vi-VN" sz="800" dirty="0"/>
-              <a:t>Trắng, đen.</a:t>
-            </a:r>
-          </a:p>
-          <a:p>
-            <a:pPr marL="742950" lvl="1" indent="-285750">
-              <a:buFont typeface="Arial" panose="020B0604020202020204" pitchFamily="34" charset="0"/>
-              <a:buChar char="•"/>
-            </a:pPr>
-            <a:r>
-              <a:rPr lang="vi-VN" sz="800" dirty="0"/>
-              <a:t>Vàng sáng (#FFEB3B, #FFD700) – rất pop.</a:t>
-            </a:r>
-          </a:p>
-          <a:p>
-            <a:pPr marL="742950" lvl="1" indent="-285750">
-              <a:buFont typeface="Arial" panose="020B0604020202020204" pitchFamily="34" charset="0"/>
-              <a:buChar char="•"/>
-            </a:pPr>
-            <a:r>
-              <a:rPr lang="vi-VN" sz="800" dirty="0"/>
-              <a:t>Cam sáng (#FF9800).</a:t>
-            </a:r>
-          </a:p>
-          <a:p>
-            <a:pPr marL="742950" lvl="1" indent="-285750">
-              <a:buFont typeface="Arial" panose="020B0604020202020204" pitchFamily="34" charset="0"/>
-              <a:buChar char="•"/>
-            </a:pPr>
-            <a:r>
-              <a:rPr lang="vi-VN" sz="800" dirty="0"/>
-              <a:t>Hồng đậm / magenta (#C2185B, #D81B60).</a:t>
-            </a:r>
-          </a:p>
-          <a:p>
-            <a:pPr marL="742950" lvl="1" indent="-285750">
-              <a:buFont typeface="Arial" panose="020B0604020202020204" pitchFamily="34" charset="0"/>
-              <a:buChar char="•"/>
-            </a:pPr>
-            <a:r>
-              <a:rPr lang="vi-VN" sz="800" dirty="0"/>
-              <a:t>Xanh dương đậm (#1976D2, #0D47A1).</a:t>
-            </a:r>
-          </a:p>
-          <a:p>
-            <a:pPr>
-              <a:buFont typeface="Arial" panose="020B0604020202020204" pitchFamily="34" charset="0"/>
-              <a:buChar char="•"/>
-            </a:pPr>
-            <a:r>
-              <a:rPr lang="vi-VN" sz="800" b="1" dirty="0"/>
-              <a:t>Tương phản tốt đặc biệt với #ED1C24 (đỏ)</a:t>
-            </a:r>
-            <a:r>
-              <a:rPr lang="vi-VN" sz="800" dirty="0"/>
-              <a:t>:</a:t>
-            </a:r>
-          </a:p>
-          <a:p>
-            <a:pPr marL="742950" lvl="1" indent="-285750">
-              <a:buFont typeface="Arial" panose="020B0604020202020204" pitchFamily="34" charset="0"/>
-              <a:buChar char="•"/>
-            </a:pPr>
-            <a:r>
-              <a:rPr lang="vi-VN" sz="800" dirty="0"/>
-              <a:t>Trắng, đen.</a:t>
-            </a:r>
-          </a:p>
-          <a:p>
-            <a:pPr marL="742950" lvl="1" indent="-285750">
-              <a:buFont typeface="Arial" panose="020B0604020202020204" pitchFamily="34" charset="0"/>
-              <a:buChar char="•"/>
-            </a:pPr>
-            <a:r>
-              <a:rPr lang="vi-VN" sz="800" dirty="0"/>
-              <a:t>Xanh ngọc / turquoise (#00E5FF, #1DE9B6, #26A69A).</a:t>
-            </a:r>
-          </a:p>
-          <a:p>
-            <a:pPr marL="742950" lvl="1" indent="-285750">
-              <a:buFont typeface="Arial" panose="020B0604020202020204" pitchFamily="34" charset="0"/>
-              <a:buChar char="•"/>
-            </a:pPr>
-            <a:r>
-              <a:rPr lang="vi-VN" sz="800" dirty="0"/>
-              <a:t>Xanh cyan sáng (#00D4FF).</a:t>
-            </a:r>
-          </a:p>
-          <a:p>
-            <a:pPr marL="742950" lvl="1" indent="-285750">
-              <a:buFont typeface="Arial" panose="020B0604020202020204" pitchFamily="34" charset="0"/>
-              <a:buChar char="•"/>
-            </a:pPr>
-            <a:r>
-              <a:rPr lang="vi-VN" sz="800" dirty="0"/>
-              <a:t>Xanh lá nhạt (#A5D6A7) – tạo sự cân bằng.</a:t>
-            </a:r>
-          </a:p>
-          <a:p>
-            <a:pPr marL="742950" lvl="1" indent="-285750">
-              <a:buFont typeface="Arial" panose="020B0604020202020204" pitchFamily="34" charset="0"/>
-              <a:buChar char="•"/>
-            </a:pPr>
-            <a:r>
-              <a:rPr lang="vi-VN" sz="800" dirty="0"/>
-              <a:t>Vàng (#FFEB3B).</a:t>
-            </a:r>
-          </a:p>
-          <a:p>
-            <a:r>
-              <a:rPr lang="vi-VN" sz="800" dirty="0">
-                <a:effectLst/>
-              </a:rPr>
-              <a:t>Tóm lại, nếu dùng cho text/icon:</a:t>
-            </a:r>
-          </a:p>
-          <a:p>
-            <a:pPr>
-              <a:buFont typeface="Arial" panose="020B0604020202020204" pitchFamily="34" charset="0"/>
-              <a:buChar char="•"/>
-            </a:pPr>
-            <a:r>
-              <a:rPr lang="vi-VN" sz="800" dirty="0"/>
-              <a:t>Trên nền trắng/xám nhạt → dùng #00A651, #ED1C24, #000000, #333333.</a:t>
-            </a:r>
-          </a:p>
-          <a:p>
-            <a:pPr>
-              <a:buFont typeface="Arial" panose="020B0604020202020204" pitchFamily="34" charset="0"/>
-              <a:buChar char="•"/>
-            </a:pPr>
-            <a:r>
-              <a:rPr lang="vi-VN" sz="800" dirty="0"/>
-              <a:t>Trên nền đen → dùng #FFFFFF, #00A651, #ED1C24.</a:t>
-            </a:r>
-          </a:p>
-          <a:p>
-            <a:r>
-              <a:rPr lang="vi-VN" sz="800" dirty="0">
-                <a:effectLst/>
-              </a:rPr>
-              <a:t>Hy vọng giúp bạn chọn được background phù hợp cho OMEGA.ERP! Nếu bạn muốn gợi ý cụ thể hơn (ví dụ kèm hướng gradient), cứ cho mình biết thêm ý định (dark/light theme, website hay app, v.v.). </a:t>
-            </a:r>
-          </a:p>
-        </p:txBody>
-      </p:sp>
+      </p:pic>
+      <p:pic>
+        <p:nvPicPr>
+          <p:cNvPr id="15" name="Graphic 14">
+            <a:extLst>
+              <a:ext uri="{FF2B5EF4-FFF2-40B4-BE49-F238E27FC236}">
+                <a16:creationId xmlns:a16="http://schemas.microsoft.com/office/drawing/2014/main" id="{FEBC3746-97D6-4863-8E91-23E132F06E95}"/>
+              </a:ext>
+            </a:extLst>
+          </p:cNvPr>
+          <p:cNvPicPr>
+            <a:picLocks noChangeAspect="1"/>
+          </p:cNvPicPr>
+          <p:nvPr/>
+        </p:nvPicPr>
+        <p:blipFill>
+          <a:blip r:embed="rId3">
+            <a:extLst>
+              <a:ext uri="{28A0092B-C50C-407E-A947-70E740481C1C}">
+                <a14:useLocalDpi xmlns:a14="http://schemas.microsoft.com/office/drawing/2010/main" val="0"/>
+              </a:ext>
+              <a:ext uri="{96DAC541-7B7A-43D3-8B79-37D633B846F1}">
+                <asvg:svgBlip xmlns:asvg="http://schemas.microsoft.com/office/drawing/2016/SVG/main" r:embed="rId4"/>
+              </a:ext>
+            </a:extLst>
+          </a:blip>
+          <a:stretch>
+            <a:fillRect/>
+          </a:stretch>
+        </p:blipFill>
+        <p:spPr>
+          <a:xfrm>
+            <a:off x="6153596" y="231992"/>
+            <a:ext cx="5952839" cy="5952839"/>
+          </a:xfrm>
+          <a:prstGeom prst="rect">
+            <a:avLst/>
+          </a:prstGeom>
+        </p:spPr>
+      </p:pic>
     </p:spTree>
     <p:extLst>
       <p:ext uri="{BB962C8B-B14F-4D97-AF65-F5344CB8AC3E}">
-        <p14:creationId xmlns:p14="http://schemas.microsoft.com/office/powerpoint/2010/main" val="3559163118"/>
+        <p14:creationId xmlns:p14="http://schemas.microsoft.com/office/powerpoint/2010/main" val="1861429841"/>
       </p:ext>
     </p:extLst>
   </p:cSld>
@@ -4891,6 +4340,663 @@
         <p:spPr>
           <a:xfrm>
             <a:off x="394447" y="234763"/>
+            <a:ext cx="11568953" cy="6001643"/>
+          </a:xfrm>
+          <a:prstGeom prst="rect">
+            <a:avLst/>
+          </a:prstGeom>
+          <a:noFill/>
+        </p:spPr>
+        <p:txBody>
+          <a:bodyPr wrap="square" rtlCol="0">
+            <a:spAutoFit/>
+          </a:bodyPr>
+          <a:lstStyle/>
+          <a:p>
+            <a:r>
+              <a:rPr lang="en-US" sz="800" dirty="0">
+                <a:effectLst/>
+              </a:rPr>
+              <a:t>GR: </a:t>
+            </a:r>
+            <a:r>
+              <a:rPr lang="vi-VN" sz="800" dirty="0">
+                <a:effectLst/>
+              </a:rPr>
+              <a:t>Logo của bạn sử dụng hai màu chủ đạo rất nổi bật và tương phản mạnh:</a:t>
+            </a:r>
+          </a:p>
+          <a:p>
+            <a:pPr>
+              <a:buFont typeface="Arial" panose="020B0604020202020204" pitchFamily="34" charset="0"/>
+              <a:buChar char="•"/>
+            </a:pPr>
+            <a:r>
+              <a:rPr lang="vi-VN" sz="800" b="1" dirty="0"/>
+              <a:t>Xanh lá đậm tươi</a:t>
+            </a:r>
+            <a:r>
+              <a:rPr lang="vi-VN" sz="800" dirty="0"/>
+              <a:t> (#00A651) – màu xanh lá cây tươi sáng, mang cảm giác năng lượng, tăng trưởng, tin cậy (thường thấy trong ERP, công nghệ, môi trường).</a:t>
+            </a:r>
+          </a:p>
+          <a:p>
+            <a:pPr>
+              <a:buFont typeface="Arial" panose="020B0604020202020204" pitchFamily="34" charset="0"/>
+              <a:buChar char="•"/>
+            </a:pPr>
+            <a:r>
+              <a:rPr lang="vi-VN" sz="800" b="1" dirty="0"/>
+              <a:t>Đỏ tươi sáng</a:t>
+            </a:r>
+            <a:r>
+              <a:rPr lang="vi-VN" sz="800" dirty="0"/>
+              <a:t> (#ED1C24) – màu đỏ năng động, mạnh mẽ, chú ý cao, urgency.</a:t>
+            </a:r>
+          </a:p>
+          <a:p>
+            <a:r>
+              <a:rPr lang="vi-VN" sz="800" dirty="0">
+                <a:effectLst/>
+              </a:rPr>
+              <a:t>Cặp màu này đã có sự tương phản rất tốt (gần như complementary trên bánh xe màu), nên background cần được chọn để </a:t>
+            </a:r>
+            <a:r>
+              <a:rPr lang="vi-VN" sz="800" b="1" dirty="0">
+                <a:effectLst/>
+              </a:rPr>
+              <a:t>làm nổi bật cả hai</a:t>
+            </a:r>
+            <a:r>
+              <a:rPr lang="vi-VN" sz="800" dirty="0">
+                <a:effectLst/>
+              </a:rPr>
+              <a:t> mà không lấn át logo.</a:t>
+            </a:r>
+          </a:p>
+          <a:p>
+            <a:r>
+              <a:rPr lang="vi-VN" sz="800" b="1" dirty="0"/>
+              <a:t>1. Hình nền đơn sắc (solid / plain background) nên là màu gì?</a:t>
+            </a:r>
+          </a:p>
+          <a:p>
+            <a:r>
+              <a:rPr lang="vi-VN" sz="800" dirty="0">
+                <a:effectLst/>
+              </a:rPr>
+              <a:t>Các lựa chọn tốt nhất (xếp theo độ khuyến nghị cho logo ERP chuyên nghiệp, hiện đại):</a:t>
+            </a:r>
+          </a:p>
+          <a:p>
+            <a:pPr>
+              <a:buFont typeface="Arial" panose="020B0604020202020204" pitchFamily="34" charset="0"/>
+              <a:buChar char="•"/>
+            </a:pPr>
+            <a:r>
+              <a:rPr lang="vi-VN" sz="800" b="1" dirty="0"/>
+              <a:t>Trắng tinh (#FFFFFF)</a:t>
+            </a:r>
+            <a:r>
+              <a:rPr lang="vi-VN" sz="800" dirty="0"/>
+              <a:t> hoặc trắng ngà nhẹ (#F8F9FA, #FAFAFA) → Lựa chọn an toàn và phổ biến nhất. Logo xanh-đỏ sẽ nổi bật cực mạnh, sạch sẽ, chuyên nghiệp, dễ đọc chữ/text overlay.</a:t>
+            </a:r>
+          </a:p>
+          <a:p>
+            <a:pPr>
+              <a:buFont typeface="Arial" panose="020B0604020202020204" pitchFamily="34" charset="0"/>
+              <a:buChar char="•"/>
+            </a:pPr>
+            <a:r>
+              <a:rPr lang="vi-VN" sz="800" b="1" dirty="0"/>
+              <a:t>Xám nhạt trung tính</a:t>
+            </a:r>
+            <a:r>
+              <a:rPr lang="vi-VN" sz="800" dirty="0"/>
+              <a:t> (#F5F5F5, #EEEEEE, #E0E0E0) → Hiện đại hơn trắng một chút, giảm độ chói, vẫn giữ độ tương phản rất cao với cả hai màu.</a:t>
+            </a:r>
+          </a:p>
+          <a:p>
+            <a:pPr>
+              <a:buFont typeface="Arial" panose="020B0604020202020204" pitchFamily="34" charset="0"/>
+              <a:buChar char="•"/>
+            </a:pPr>
+            <a:r>
+              <a:rPr lang="vi-VN" sz="800" b="1" dirty="0"/>
+              <a:t>Đen (#000000) hoặc xám đậm (#1A1A1A, #121212)</a:t>
+            </a:r>
+            <a:r>
+              <a:rPr lang="vi-VN" sz="800" dirty="0"/>
+              <a:t> → Rất mạnh mẽ, sang trọng, logo sẽ "pop" cực kỳ nổi bật (kiểu dark mode). Phù hợp nếu muốn giao diện premium, tech cao cấp.</a:t>
+            </a:r>
+          </a:p>
+          <a:p>
+            <a:pPr>
+              <a:buFont typeface="Arial" panose="020B0604020202020204" pitchFamily="34" charset="0"/>
+              <a:buChar char="•"/>
+            </a:pPr>
+            <a:r>
+              <a:rPr lang="vi-VN" sz="800" b="1" dirty="0"/>
+              <a:t>Xám trung (#808080 – #A0A0A0)</a:t>
+            </a:r>
+            <a:r>
+              <a:rPr lang="vi-VN" sz="800" dirty="0"/>
+              <a:t> → Tránh, vì tương phản với #00A651 giảm mạnh (có thể không đạt WCAG AA cho text trắng/đen overlay).</a:t>
+            </a:r>
+          </a:p>
+          <a:p>
+            <a:r>
+              <a:rPr lang="vi-VN" sz="800" dirty="0">
+                <a:effectLst/>
+              </a:rPr>
+              <a:t>→ </a:t>
+            </a:r>
+            <a:r>
+              <a:rPr lang="vi-VN" sz="800" b="1" dirty="0">
+                <a:effectLst/>
+              </a:rPr>
+              <a:t>Khuyến nghị hàng đầu</a:t>
+            </a:r>
+            <a:r>
+              <a:rPr lang="vi-VN" sz="800" dirty="0">
+                <a:effectLst/>
+              </a:rPr>
+              <a:t>: </a:t>
+            </a:r>
+            <a:r>
+              <a:rPr lang="vi-VN" sz="800" b="1" dirty="0">
+                <a:effectLst/>
+              </a:rPr>
+              <a:t>Trắng (#FFFFFF)</a:t>
+            </a:r>
+            <a:r>
+              <a:rPr lang="vi-VN" sz="800" dirty="0">
+                <a:effectLst/>
+              </a:rPr>
+              <a:t> hoặc </a:t>
+            </a:r>
+            <a:r>
+              <a:rPr lang="vi-VN" sz="800" b="1" dirty="0">
+                <a:effectLst/>
+              </a:rPr>
+              <a:t>xám rất nhạt (#F8F8F8)</a:t>
+            </a:r>
+            <a:r>
+              <a:rPr lang="vi-VN" sz="800" dirty="0">
+                <a:effectLst/>
+              </a:rPr>
+              <a:t> cho hầu hết các trường hợp website/ứng dụng ERP.</a:t>
+            </a:r>
+          </a:p>
+          <a:p>
+            <a:r>
+              <a:rPr lang="vi-VN" sz="800" b="1" dirty="0"/>
+              <a:t>2. Hình nền đa sắc / gradient nên là tổ hợp của cặp đôi, bộ ba màu gì?</a:t>
+            </a:r>
+          </a:p>
+          <a:p>
+            <a:r>
+              <a:rPr lang="vi-VN" sz="800" dirty="0">
+                <a:effectLst/>
+              </a:rPr>
+              <a:t>Gradient cần nhẹ nhàng, không lấn át logo. Nên dùng tông trung tính + accent nhẹ từ hai màu chủ đạo.</a:t>
+            </a:r>
+          </a:p>
+          <a:p>
+            <a:r>
+              <a:rPr lang="vi-VN" sz="800" dirty="0">
+                <a:effectLst/>
+              </a:rPr>
+              <a:t>Các tổ hợp đẹp và cân bằng:</a:t>
+            </a:r>
+          </a:p>
+          <a:p>
+            <a:pPr>
+              <a:buFont typeface="Arial" panose="020B0604020202020204" pitchFamily="34" charset="0"/>
+              <a:buChar char="•"/>
+            </a:pPr>
+            <a:r>
+              <a:rPr lang="vi-VN" sz="800" b="1" dirty="0"/>
+              <a:t>Cặp đôi đơn giản &amp; an toàn</a:t>
+            </a:r>
+            <a:r>
+              <a:rPr lang="vi-VN" sz="800" dirty="0"/>
+              <a:t>:</a:t>
+            </a:r>
+          </a:p>
+          <a:p>
+            <a:pPr marL="742950" lvl="1" indent="-285750">
+              <a:buFont typeface="Arial" panose="020B0604020202020204" pitchFamily="34" charset="0"/>
+              <a:buChar char="•"/>
+            </a:pPr>
+            <a:r>
+              <a:rPr lang="vi-VN" sz="800" dirty="0"/>
+              <a:t>Từ #F8F9FA (trắng ngà) → #E8F5E9 (xanh lá rất nhạt) – nhẹ, tươi mới, nhấn nhẹ màu xanh chủ đạo.</a:t>
+            </a:r>
+          </a:p>
+          <a:p>
+            <a:pPr marL="742950" lvl="1" indent="-285750">
+              <a:buFont typeface="Arial" panose="020B0604020202020204" pitchFamily="34" charset="0"/>
+              <a:buChar char="•"/>
+            </a:pPr>
+            <a:r>
+              <a:rPr lang="vi-VN" sz="800" dirty="0"/>
+              <a:t>Từ #FFFFFF → #FFF5F5 (đỏ rất nhạt / hồng nhạt) – ấm áp, nhấn nhẹ màu đỏ.</a:t>
+            </a:r>
+          </a:p>
+          <a:p>
+            <a:pPr marL="742950" lvl="1" indent="-285750">
+              <a:buFont typeface="Arial" panose="020B0604020202020204" pitchFamily="34" charset="0"/>
+              <a:buChar char="•"/>
+            </a:pPr>
+            <a:r>
+              <a:rPr lang="vi-VN" sz="800" dirty="0"/>
+              <a:t>Từ #F5F5F5 → #E8ECEF (xám nhạt gradient) – trung tính, hiện đại.</a:t>
+            </a:r>
+          </a:p>
+          <a:p>
+            <a:pPr>
+              <a:buFont typeface="Arial" panose="020B0604020202020204" pitchFamily="34" charset="0"/>
+              <a:buChar char="•"/>
+            </a:pPr>
+            <a:r>
+              <a:rPr lang="vi-VN" sz="800" b="1" dirty="0"/>
+              <a:t>Gradient dùng cả hai màu chủ đạo (nhẹ)</a:t>
+            </a:r>
+            <a:r>
+              <a:rPr lang="vi-VN" sz="800" dirty="0"/>
+              <a:t>:</a:t>
+            </a:r>
+          </a:p>
+          <a:p>
+            <a:pPr marL="742950" lvl="1" indent="-285750">
+              <a:buFont typeface="Arial" panose="020B0604020202020204" pitchFamily="34" charset="0"/>
+              <a:buChar char="•"/>
+            </a:pPr>
+            <a:r>
+              <a:rPr lang="vi-VN" sz="800" dirty="0"/>
+              <a:t>Từ #E8F5E9 (xanh nhạt) → #FFEBEE (đỏ nhạt) – rất tinh tế, liên kết hai màu logo.</a:t>
+            </a:r>
+          </a:p>
+          <a:p>
+            <a:pPr marL="742950" lvl="1" indent="-285750">
+              <a:buFont typeface="Arial" panose="020B0604020202020204" pitchFamily="34" charset="0"/>
+              <a:buChar char="•"/>
+            </a:pPr>
+            <a:r>
+              <a:rPr lang="vi-VN" sz="800" dirty="0"/>
+              <a:t>Từ #D4F4E2 → #FFE4E1 – gradient tươi sáng, năng động nhưng không chói.</a:t>
+            </a:r>
+          </a:p>
+          <a:p>
+            <a:pPr>
+              <a:buFont typeface="Arial" panose="020B0604020202020204" pitchFamily="34" charset="0"/>
+              <a:buChar char="•"/>
+            </a:pPr>
+            <a:r>
+              <a:rPr lang="vi-VN" sz="800" b="1" dirty="0"/>
+              <a:t>Bộ ba màu đẹp (gradient 3 điểm)</a:t>
+            </a:r>
+            <a:r>
+              <a:rPr lang="vi-VN" sz="800" dirty="0"/>
+              <a:t>:</a:t>
+            </a:r>
+          </a:p>
+          <a:p>
+            <a:pPr marL="742950" lvl="1" indent="-285750">
+              <a:buFont typeface="Arial" panose="020B0604020202020204" pitchFamily="34" charset="0"/>
+              <a:buChar char="•"/>
+            </a:pPr>
+            <a:r>
+              <a:rPr lang="vi-VN" sz="800" dirty="0"/>
+              <a:t>#FFFFFF → #E8F5E9 → #FFEBEE – trắng → xanh nhạt → đỏ nhạt (rất hài hòa).</a:t>
+            </a:r>
+          </a:p>
+          <a:p>
+            <a:pPr marL="742950" lvl="1" indent="-285750">
+              <a:buFont typeface="Arial" panose="020B0604020202020204" pitchFamily="34" charset="0"/>
+              <a:buChar char="•"/>
+            </a:pPr>
+            <a:r>
+              <a:rPr lang="vi-VN" sz="800" dirty="0"/>
+              <a:t>#F0F4F8 → #E8F5E9 → #FFF0F0 – tông lạnh → xanh → ấm nhẹ.</a:t>
+            </a:r>
+          </a:p>
+          <a:p>
+            <a:pPr marL="742950" lvl="1" indent="-285750">
+              <a:buFont typeface="Arial" panose="020B0604020202020204" pitchFamily="34" charset="0"/>
+              <a:buChar char="•"/>
+            </a:pPr>
+            <a:r>
+              <a:rPr lang="vi-VN" sz="800" dirty="0"/>
+              <a:t>#1E3A2F (xanh đậm tối) → #00A651 → #ED1C24 – mạnh mẽ, nhưng chỉ dùng nếu muốn gradient đậm, ấn tượng cao (dark theme).</a:t>
+            </a:r>
+          </a:p>
+          <a:p>
+            <a:r>
+              <a:rPr lang="vi-VN" sz="800" dirty="0">
+                <a:effectLst/>
+              </a:rPr>
+              <a:t>→ </a:t>
+            </a:r>
+            <a:r>
+              <a:rPr lang="vi-VN" sz="800" b="1" dirty="0">
+                <a:effectLst/>
+              </a:rPr>
+              <a:t>Khuyến nghị hàng đầu</a:t>
+            </a:r>
+            <a:r>
+              <a:rPr lang="vi-VN" sz="800" dirty="0">
+                <a:effectLst/>
+              </a:rPr>
+              <a:t>: Gradient nhẹ từ </a:t>
+            </a:r>
+            <a:r>
+              <a:rPr lang="vi-VN" sz="800" b="1" dirty="0">
+                <a:effectLst/>
+              </a:rPr>
+              <a:t>trắng/xám nhạt → xanh rất nhạt (#E8F5E9)</a:t>
+            </a:r>
+            <a:r>
+              <a:rPr lang="vi-VN" sz="800" dirty="0">
+                <a:effectLst/>
+              </a:rPr>
+              <a:t> hoặc </a:t>
+            </a:r>
+            <a:r>
+              <a:rPr lang="vi-VN" sz="800" b="1" dirty="0">
+                <a:effectLst/>
+              </a:rPr>
+              <a:t>trắng → đỏ rất nhạt (#FFEBEE)</a:t>
+            </a:r>
+            <a:r>
+              <a:rPr lang="vi-VN" sz="800" dirty="0">
+                <a:effectLst/>
+              </a:rPr>
+              <a:t>. Tránh gradient mạnh giữa #00A651 và #ED1C24 trực tiếp vì sẽ tạo cảm giác "đánh nhau" và làm logo khó nổi.</a:t>
+            </a:r>
+          </a:p>
+          <a:p>
+            <a:r>
+              <a:rPr lang="vi-VN" sz="800" b="1" dirty="0"/>
+              <a:t>3. Các màu tương phản tốt nhất với cặp màu chủ đạo (#00A651 &amp; #ED1C24)</a:t>
+            </a:r>
+          </a:p>
+          <a:p>
+            <a:r>
+              <a:rPr lang="vi-VN" sz="800" dirty="0">
+                <a:effectLst/>
+              </a:rPr>
+              <a:t>Đây là các màu có độ tương phản cao (dùng cho text, icon, button, border khi đặt lên nền hoặc ngược lại):</a:t>
+            </a:r>
+          </a:p>
+          <a:p>
+            <a:pPr>
+              <a:buFont typeface="Arial" panose="020B0604020202020204" pitchFamily="34" charset="0"/>
+              <a:buChar char="•"/>
+            </a:pPr>
+            <a:r>
+              <a:rPr lang="vi-VN" sz="800" b="1" dirty="0"/>
+              <a:t>Tương phản cực cao với cả hai</a:t>
+            </a:r>
+            <a:r>
+              <a:rPr lang="vi-VN" sz="800" dirty="0"/>
+              <a:t> (top choice):</a:t>
+            </a:r>
+          </a:p>
+          <a:p>
+            <a:pPr marL="742950" lvl="1" indent="-285750">
+              <a:buFont typeface="Arial" panose="020B0604020202020204" pitchFamily="34" charset="0"/>
+              <a:buChar char="•"/>
+            </a:pPr>
+            <a:r>
+              <a:rPr lang="vi-VN" sz="800" b="1" dirty="0"/>
+              <a:t>Trắng (#FFFFFF)</a:t>
+            </a:r>
+            <a:r>
+              <a:rPr lang="vi-VN" sz="800" dirty="0"/>
+              <a:t> – tuyệt vời trên cả xanh và đỏ.</a:t>
+            </a:r>
+          </a:p>
+          <a:p>
+            <a:pPr marL="742950" lvl="1" indent="-285750">
+              <a:buFont typeface="Arial" panose="020B0604020202020204" pitchFamily="34" charset="0"/>
+              <a:buChar char="•"/>
+            </a:pPr>
+            <a:r>
+              <a:rPr lang="vi-VN" sz="800" b="1" dirty="0"/>
+              <a:t>Đen (#000000)</a:t>
+            </a:r>
+            <a:r>
+              <a:rPr lang="vi-VN" sz="800" dirty="0"/>
+              <a:t> hoặc gần đen (#0F0F0F) – cực nổi trên cả hai.</a:t>
+            </a:r>
+          </a:p>
+          <a:p>
+            <a:pPr marL="742950" lvl="1" indent="-285750">
+              <a:buFont typeface="Arial" panose="020B0604020202020204" pitchFamily="34" charset="0"/>
+              <a:buChar char="•"/>
+            </a:pPr>
+            <a:r>
+              <a:rPr lang="vi-VN" sz="800" b="1" dirty="0"/>
+              <a:t>Xám đậm (#333333, #222222)</a:t>
+            </a:r>
+            <a:r>
+              <a:rPr lang="vi-VN" sz="800" dirty="0"/>
+              <a:t>.</a:t>
+            </a:r>
+          </a:p>
+          <a:p>
+            <a:pPr>
+              <a:buFont typeface="Arial" panose="020B0604020202020204" pitchFamily="34" charset="0"/>
+              <a:buChar char="•"/>
+            </a:pPr>
+            <a:r>
+              <a:rPr lang="vi-VN" sz="800" b="1" dirty="0"/>
+              <a:t>Tương phản tốt đặc biệt với #00A651 (xanh)</a:t>
+            </a:r>
+            <a:r>
+              <a:rPr lang="vi-VN" sz="800" dirty="0"/>
+              <a:t>:</a:t>
+            </a:r>
+          </a:p>
+          <a:p>
+            <a:pPr marL="742950" lvl="1" indent="-285750">
+              <a:buFont typeface="Arial" panose="020B0604020202020204" pitchFamily="34" charset="0"/>
+              <a:buChar char="•"/>
+            </a:pPr>
+            <a:r>
+              <a:rPr lang="vi-VN" sz="800" dirty="0"/>
+              <a:t>Trắng, đen.</a:t>
+            </a:r>
+          </a:p>
+          <a:p>
+            <a:pPr marL="742950" lvl="1" indent="-285750">
+              <a:buFont typeface="Arial" panose="020B0604020202020204" pitchFamily="34" charset="0"/>
+              <a:buChar char="•"/>
+            </a:pPr>
+            <a:r>
+              <a:rPr lang="vi-VN" sz="800" dirty="0"/>
+              <a:t>Vàng sáng (#FFEB3B, #FFD700) – rất pop.</a:t>
+            </a:r>
+          </a:p>
+          <a:p>
+            <a:pPr marL="742950" lvl="1" indent="-285750">
+              <a:buFont typeface="Arial" panose="020B0604020202020204" pitchFamily="34" charset="0"/>
+              <a:buChar char="•"/>
+            </a:pPr>
+            <a:r>
+              <a:rPr lang="vi-VN" sz="800" dirty="0"/>
+              <a:t>Cam sáng (#FF9800).</a:t>
+            </a:r>
+          </a:p>
+          <a:p>
+            <a:pPr marL="742950" lvl="1" indent="-285750">
+              <a:buFont typeface="Arial" panose="020B0604020202020204" pitchFamily="34" charset="0"/>
+              <a:buChar char="•"/>
+            </a:pPr>
+            <a:r>
+              <a:rPr lang="vi-VN" sz="800" dirty="0"/>
+              <a:t>Hồng đậm / magenta (#C2185B, #D81B60).</a:t>
+            </a:r>
+          </a:p>
+          <a:p>
+            <a:pPr marL="742950" lvl="1" indent="-285750">
+              <a:buFont typeface="Arial" panose="020B0604020202020204" pitchFamily="34" charset="0"/>
+              <a:buChar char="•"/>
+            </a:pPr>
+            <a:r>
+              <a:rPr lang="vi-VN" sz="800" dirty="0"/>
+              <a:t>Xanh dương đậm (#1976D2, #0D47A1).</a:t>
+            </a:r>
+          </a:p>
+          <a:p>
+            <a:pPr>
+              <a:buFont typeface="Arial" panose="020B0604020202020204" pitchFamily="34" charset="0"/>
+              <a:buChar char="•"/>
+            </a:pPr>
+            <a:r>
+              <a:rPr lang="vi-VN" sz="800" b="1" dirty="0"/>
+              <a:t>Tương phản tốt đặc biệt với #ED1C24 (đỏ)</a:t>
+            </a:r>
+            <a:r>
+              <a:rPr lang="vi-VN" sz="800" dirty="0"/>
+              <a:t>:</a:t>
+            </a:r>
+          </a:p>
+          <a:p>
+            <a:pPr marL="742950" lvl="1" indent="-285750">
+              <a:buFont typeface="Arial" panose="020B0604020202020204" pitchFamily="34" charset="0"/>
+              <a:buChar char="•"/>
+            </a:pPr>
+            <a:r>
+              <a:rPr lang="vi-VN" sz="800" dirty="0"/>
+              <a:t>Trắng, đen.</a:t>
+            </a:r>
+          </a:p>
+          <a:p>
+            <a:pPr marL="742950" lvl="1" indent="-285750">
+              <a:buFont typeface="Arial" panose="020B0604020202020204" pitchFamily="34" charset="0"/>
+              <a:buChar char="•"/>
+            </a:pPr>
+            <a:r>
+              <a:rPr lang="vi-VN" sz="800" dirty="0"/>
+              <a:t>Xanh ngọc / turquoise (#00E5FF, #1DE9B6, #26A69A).</a:t>
+            </a:r>
+          </a:p>
+          <a:p>
+            <a:pPr marL="742950" lvl="1" indent="-285750">
+              <a:buFont typeface="Arial" panose="020B0604020202020204" pitchFamily="34" charset="0"/>
+              <a:buChar char="•"/>
+            </a:pPr>
+            <a:r>
+              <a:rPr lang="vi-VN" sz="800" dirty="0"/>
+              <a:t>Xanh cyan sáng (#00D4FF).</a:t>
+            </a:r>
+          </a:p>
+          <a:p>
+            <a:pPr marL="742950" lvl="1" indent="-285750">
+              <a:buFont typeface="Arial" panose="020B0604020202020204" pitchFamily="34" charset="0"/>
+              <a:buChar char="•"/>
+            </a:pPr>
+            <a:r>
+              <a:rPr lang="vi-VN" sz="800" dirty="0"/>
+              <a:t>Xanh lá nhạt (#A5D6A7) – tạo sự cân bằng.</a:t>
+            </a:r>
+          </a:p>
+          <a:p>
+            <a:pPr marL="742950" lvl="1" indent="-285750">
+              <a:buFont typeface="Arial" panose="020B0604020202020204" pitchFamily="34" charset="0"/>
+              <a:buChar char="•"/>
+            </a:pPr>
+            <a:r>
+              <a:rPr lang="vi-VN" sz="800" dirty="0"/>
+              <a:t>Vàng (#FFEB3B).</a:t>
+            </a:r>
+          </a:p>
+          <a:p>
+            <a:r>
+              <a:rPr lang="vi-VN" sz="800" dirty="0">
+                <a:effectLst/>
+              </a:rPr>
+              <a:t>Tóm lại, nếu dùng cho text/icon:</a:t>
+            </a:r>
+          </a:p>
+          <a:p>
+            <a:pPr>
+              <a:buFont typeface="Arial" panose="020B0604020202020204" pitchFamily="34" charset="0"/>
+              <a:buChar char="•"/>
+            </a:pPr>
+            <a:r>
+              <a:rPr lang="vi-VN" sz="800" dirty="0"/>
+              <a:t>Trên nền trắng/xám nhạt → dùng #00A651, #ED1C24, #000000, #333333.</a:t>
+            </a:r>
+          </a:p>
+          <a:p>
+            <a:pPr>
+              <a:buFont typeface="Arial" panose="020B0604020202020204" pitchFamily="34" charset="0"/>
+              <a:buChar char="•"/>
+            </a:pPr>
+            <a:r>
+              <a:rPr lang="vi-VN" sz="800" dirty="0"/>
+              <a:t>Trên nền đen → dùng #FFFFFF, #00A651, #ED1C24.</a:t>
+            </a:r>
+          </a:p>
+          <a:p>
+            <a:r>
+              <a:rPr lang="vi-VN" sz="800" dirty="0">
+                <a:effectLst/>
+              </a:rPr>
+              <a:t>Hy vọng giúp bạn chọn được background phù hợp cho OMEGA.ERP! Nếu bạn muốn gợi ý cụ thể hơn (ví dụ kèm hướng gradient), cứ cho mình biết thêm ý định (dark/light theme, website hay app, v.v.). </a:t>
+            </a:r>
+          </a:p>
+        </p:txBody>
+      </p:sp>
+    </p:spTree>
+    <p:extLst>
+      <p:ext uri="{BB962C8B-B14F-4D97-AF65-F5344CB8AC3E}">
+        <p14:creationId xmlns:p14="http://schemas.microsoft.com/office/powerpoint/2010/main" val="3559163118"/>
+      </p:ext>
+    </p:extLst>
+  </p:cSld>
+  <p:clrMapOvr>
+    <a:masterClrMapping/>
+  </p:clrMapOvr>
+</p:sld>
+</file>
+
+<file path=ppt/slides/slide4.xml><?xml version="1.0" encoding="utf-8"?>
+<p:sld xmlns:a="http://schemas.openxmlformats.org/drawingml/2006/main" xmlns:r="http://schemas.openxmlformats.org/officeDocument/2006/relationships" xmlns:p="http://schemas.openxmlformats.org/presentationml/2006/main">
+  <p:cSld>
+    <p:spTree>
+      <p:nvGrpSpPr>
+        <p:cNvPr id="1" name=""/>
+        <p:cNvGrpSpPr/>
+        <p:nvPr/>
+      </p:nvGrpSpPr>
+      <p:grpSpPr>
+        <a:xfrm>
+          <a:off x="0" y="0"/>
+          <a:ext cx="0" cy="0"/>
+          <a:chOff x="0" y="0"/>
+          <a:chExt cx="0" cy="0"/>
+        </a:xfrm>
+      </p:grpSpPr>
+      <p:sp>
+        <p:nvSpPr>
+          <p:cNvPr id="2" name="TextBox 1">
+            <a:extLst>
+              <a:ext uri="{FF2B5EF4-FFF2-40B4-BE49-F238E27FC236}">
+                <a16:creationId xmlns:a16="http://schemas.microsoft.com/office/drawing/2014/main" id="{43CF4336-E580-4101-B9BE-7EA9943BC882}"/>
+              </a:ext>
+            </a:extLst>
+          </p:cNvPr>
+          <p:cNvSpPr txBox="1"/>
+          <p:nvPr/>
+        </p:nvSpPr>
+        <p:spPr>
+          <a:xfrm>
+            <a:off x="394447" y="234763"/>
             <a:ext cx="11568953" cy="3539430"/>
           </a:xfrm>
           <a:prstGeom prst="rect">
@@ -5112,7 +5218,7 @@
 </p:sld>
 </file>
 
-<file path=ppt/slides/slide4.xml><?xml version="1.0" encoding="utf-8"?>
+<file path=ppt/slides/slide5.xml><?xml version="1.0" encoding="utf-8"?>
 <p:sld xmlns:a="http://schemas.openxmlformats.org/drawingml/2006/main" xmlns:r="http://schemas.openxmlformats.org/officeDocument/2006/relationships" xmlns:p="http://schemas.openxmlformats.org/presentationml/2006/main">
   <p:cSld>
     <p:spTree>

--- a/public/projects/omega/assets/notes.pptx
+++ b/public/projects/omega/assets/notes.pptx
@@ -263,7 +263,7 @@
           <a:p>
             <a:fld id="{0935FF75-45A3-4BBC-8BA3-1E37C804F307}" type="datetimeFigureOut">
               <a:rPr lang="en-US" smtClean="0"/>
-              <a:t>2/8/2026</a:t>
+              <a:t>3/5/2026</a:t>
             </a:fld>
             <a:endParaRPr lang="en-US"/>
           </a:p>
@@ -461,7 +461,7 @@
           <a:p>
             <a:fld id="{0935FF75-45A3-4BBC-8BA3-1E37C804F307}" type="datetimeFigureOut">
               <a:rPr lang="en-US" smtClean="0"/>
-              <a:t>2/8/2026</a:t>
+              <a:t>3/5/2026</a:t>
             </a:fld>
             <a:endParaRPr lang="en-US"/>
           </a:p>
@@ -669,7 +669,7 @@
           <a:p>
             <a:fld id="{0935FF75-45A3-4BBC-8BA3-1E37C804F307}" type="datetimeFigureOut">
               <a:rPr lang="en-US" smtClean="0"/>
-              <a:t>2/8/2026</a:t>
+              <a:t>3/5/2026</a:t>
             </a:fld>
             <a:endParaRPr lang="en-US"/>
           </a:p>
@@ -867,7 +867,7 @@
           <a:p>
             <a:fld id="{0935FF75-45A3-4BBC-8BA3-1E37C804F307}" type="datetimeFigureOut">
               <a:rPr lang="en-US" smtClean="0"/>
-              <a:t>2/8/2026</a:t>
+              <a:t>3/5/2026</a:t>
             </a:fld>
             <a:endParaRPr lang="en-US"/>
           </a:p>
@@ -1142,7 +1142,7 @@
           <a:p>
             <a:fld id="{0935FF75-45A3-4BBC-8BA3-1E37C804F307}" type="datetimeFigureOut">
               <a:rPr lang="en-US" smtClean="0"/>
-              <a:t>2/8/2026</a:t>
+              <a:t>3/5/2026</a:t>
             </a:fld>
             <a:endParaRPr lang="en-US"/>
           </a:p>
@@ -1407,7 +1407,7 @@
           <a:p>
             <a:fld id="{0935FF75-45A3-4BBC-8BA3-1E37C804F307}" type="datetimeFigureOut">
               <a:rPr lang="en-US" smtClean="0"/>
-              <a:t>2/8/2026</a:t>
+              <a:t>3/5/2026</a:t>
             </a:fld>
             <a:endParaRPr lang="en-US"/>
           </a:p>
@@ -1819,7 +1819,7 @@
           <a:p>
             <a:fld id="{0935FF75-45A3-4BBC-8BA3-1E37C804F307}" type="datetimeFigureOut">
               <a:rPr lang="en-US" smtClean="0"/>
-              <a:t>2/8/2026</a:t>
+              <a:t>3/5/2026</a:t>
             </a:fld>
             <a:endParaRPr lang="en-US"/>
           </a:p>
@@ -1960,7 +1960,7 @@
           <a:p>
             <a:fld id="{0935FF75-45A3-4BBC-8BA3-1E37C804F307}" type="datetimeFigureOut">
               <a:rPr lang="en-US" smtClean="0"/>
-              <a:t>2/8/2026</a:t>
+              <a:t>3/5/2026</a:t>
             </a:fld>
             <a:endParaRPr lang="en-US"/>
           </a:p>
@@ -2073,7 +2073,7 @@
           <a:p>
             <a:fld id="{0935FF75-45A3-4BBC-8BA3-1E37C804F307}" type="datetimeFigureOut">
               <a:rPr lang="en-US" smtClean="0"/>
-              <a:t>2/8/2026</a:t>
+              <a:t>3/5/2026</a:t>
             </a:fld>
             <a:endParaRPr lang="en-US"/>
           </a:p>
@@ -2384,7 +2384,7 @@
           <a:p>
             <a:fld id="{0935FF75-45A3-4BBC-8BA3-1E37C804F307}" type="datetimeFigureOut">
               <a:rPr lang="en-US" smtClean="0"/>
-              <a:t>2/8/2026</a:t>
+              <a:t>3/5/2026</a:t>
             </a:fld>
             <a:endParaRPr lang="en-US"/>
           </a:p>
@@ -2672,7 +2672,7 @@
           <a:p>
             <a:fld id="{0935FF75-45A3-4BBC-8BA3-1E37C804F307}" type="datetimeFigureOut">
               <a:rPr lang="en-US" smtClean="0"/>
-              <a:t>2/8/2026</a:t>
+              <a:t>3/5/2026</a:t>
             </a:fld>
             <a:endParaRPr lang="en-US"/>
           </a:p>
@@ -2913,7 +2913,7 @@
           <a:p>
             <a:fld id="{0935FF75-45A3-4BBC-8BA3-1E37C804F307}" type="datetimeFigureOut">
               <a:rPr lang="en-US" smtClean="0"/>
-              <a:t>2/8/2026</a:t>
+              <a:t>3/5/2026</a:t>
             </a:fld>
             <a:endParaRPr lang="en-US"/>
           </a:p>
@@ -4190,6 +4190,80 @@
           </a:p>
         </p:txBody>
       </p:sp>
+      <p:sp>
+        <p:nvSpPr>
+          <p:cNvPr id="2" name="TextBox 1">
+            <a:extLst>
+              <a:ext uri="{FF2B5EF4-FFF2-40B4-BE49-F238E27FC236}">
+                <a16:creationId xmlns:a16="http://schemas.microsoft.com/office/drawing/2014/main" id="{926EE8B1-BB83-4FB4-9616-E17382D0EAD2}"/>
+              </a:ext>
+            </a:extLst>
+          </p:cNvPr>
+          <p:cNvSpPr txBox="1"/>
+          <p:nvPr/>
+        </p:nvSpPr>
+        <p:spPr>
+          <a:xfrm>
+            <a:off x="9015506" y="5280212"/>
+            <a:ext cx="887935" cy="369332"/>
+          </a:xfrm>
+          <a:prstGeom prst="rect">
+            <a:avLst/>
+          </a:prstGeom>
+          <a:solidFill>
+            <a:srgbClr val="CCFFCC"/>
+          </a:solidFill>
+        </p:spPr>
+        <p:txBody>
+          <a:bodyPr wrap="none" rtlCol="0">
+            <a:spAutoFit/>
+          </a:bodyPr>
+          <a:lstStyle/>
+          <a:p>
+            <a:r>
+              <a:rPr lang="en-US" dirty="0"/>
+              <a:t>CCFFCC</a:t>
+            </a:r>
+          </a:p>
+        </p:txBody>
+      </p:sp>
+      <p:sp>
+        <p:nvSpPr>
+          <p:cNvPr id="25" name="TextBox 24">
+            <a:extLst>
+              <a:ext uri="{FF2B5EF4-FFF2-40B4-BE49-F238E27FC236}">
+                <a16:creationId xmlns:a16="http://schemas.microsoft.com/office/drawing/2014/main" id="{323B2A47-E009-4018-8034-F666534281C7}"/>
+              </a:ext>
+            </a:extLst>
+          </p:cNvPr>
+          <p:cNvSpPr txBox="1"/>
+          <p:nvPr/>
+        </p:nvSpPr>
+        <p:spPr>
+          <a:xfrm>
+            <a:off x="9567956" y="4445953"/>
+            <a:ext cx="841897" cy="369332"/>
+          </a:xfrm>
+          <a:prstGeom prst="rect">
+            <a:avLst/>
+          </a:prstGeom>
+          <a:solidFill>
+            <a:srgbClr val="00FFFF"/>
+          </a:solidFill>
+        </p:spPr>
+        <p:txBody>
+          <a:bodyPr wrap="none" rtlCol="0">
+            <a:spAutoFit/>
+          </a:bodyPr>
+          <a:lstStyle/>
+          <a:p>
+            <a:r>
+              <a:rPr lang="en-US" dirty="0"/>
+              <a:t>00FFFF</a:t>
+            </a:r>
+          </a:p>
+        </p:txBody>
+      </p:sp>
     </p:spTree>
     <p:extLst>
       <p:ext uri="{BB962C8B-B14F-4D97-AF65-F5344CB8AC3E}">
